--- a/practice/day2_slides/day2_practice_slides.pptx
+++ b/practice/day2_slides/day2_practice_slides.pptx
@@ -132,24 +132,24 @@
   <p:extLst>
     <p:ext uri="{521415D9-36F7-43E2-AB2F-B90AF26B5E84}">
       <p14:sectionLst xmlns:p14="http://schemas.microsoft.com/office/powerpoint/2010/main">
-        <p14:section name="표지" id="{d426b9fb-bc2e-2e08-1879-48ef6b9abc26}">
+        <p14:section name="표지" id="{dd5c4c36-045e-b7aa-53bb-963120f26e8d}">
           <p14:sldIdLst>
             <p14:sldId id="256"/>
           </p14:sldIdLst>
         </p14:section>
-        <p14:section name="진행" id="{2be0c94c-d3bf-6ef2-f2c5-f115b482e932}">
+        <p14:section name="진행" id="{d524f46f-2eee-0519-3a6e-016562a37612}">
           <p14:sldIdLst>
             <p14:sldId id="257"/>
           </p14:sldIdLst>
         </p14:section>
-        <p14:section name="PART 0 · 1일차 복습" id="{80edd791-5e34-60f5-0e79-039dfe27a104}">
+        <p14:section name="PART 0 · 1일차 복습" id="{debcc58b-4367-91a2-9fb2-909e2c9d52c2}">
           <p14:sldIdLst>
             <p14:sldId id="258"/>
             <p14:sldId id="259"/>
             <p14:sldId id="260"/>
           </p14:sldIdLst>
         </p14:section>
-        <p14:section name="PART 1 · 데이터와 전처리" id="{debc4a56-b08d-c6b1-ccd4-24854303f80c}">
+        <p14:section name="PART 1 · 데이터와 전처리" id="{604d1238-d2f1-2e19-a318-6f5b2f2a66ed}">
           <p14:sldIdLst>
             <p14:sldId id="261"/>
             <p14:sldId id="262"/>
@@ -159,7 +159,7 @@
             <p14:sldId id="266"/>
           </p14:sldIdLst>
         </p14:section>
-        <p14:section name="PART 2 · 양자 회로" id="{8020e9ab-28d8-e640-a82c-ae44eb67ac79}">
+        <p14:section name="PART 2 · 양자 회로" id="{b065f83c-abc7-662b-06d4-b39283cb5665}">
           <p14:sldIdLst>
             <p14:sldId id="267"/>
             <p14:sldId id="268"/>
@@ -168,7 +168,7 @@
             <p14:sldId id="271"/>
           </p14:sldIdLst>
         </p14:section>
-        <p14:section name="PART 3 · QGAN 학습" id="{acd67eec-1c76-6182-bcd2-be26b4ce4e53}">
+        <p14:section name="PART 3 · QGAN 학습" id="{d44eadde-f92d-b014-59be-13124924e457}">
           <p14:sldIdLst>
             <p14:sldId id="272"/>
             <p14:sldId id="273"/>
@@ -177,7 +177,7 @@
             <p14:sldId id="276"/>
           </p14:sldIdLst>
         </p14:section>
-        <p14:section name="PART 4 · 생성과 평가" id="{00f9245f-1f65-b287-5496-d6ee904e88cb}">
+        <p14:section name="PART 4 · 생성과 평가" id="{31916119-8166-fa8a-9307-e3f8b938581f}">
           <p14:sldIdLst>
             <p14:sldId id="277"/>
             <p14:sldId id="278"/>
@@ -185,7 +185,7 @@
             <p14:sldId id="280"/>
           </p14:sldIdLst>
         </p14:section>
-        <p14:section name="정리" id="{2d1877b8-8d26-3666-d2fe-761f8d2de38d}">
+        <p14:section name="정리" id="{24ec98bf-fca5-59ca-f074-84d1a14fb381}">
           <p14:sldIdLst>
             <p14:sldId id="281"/>
           </p14:sldIdLst>
@@ -2145,7 +2145,7 @@
               <a:t>- PennyLane은 wire 0을 최상위 비트, 마지막 wire를 최하위 비트로 둠. 마지막 wire가 ancilla이므로 인덱스가 짝수일 때 ancilla = 0.
 - 데이터 큐빗만 측정하면 64개 확률의 합은 항상 1. 배경이 대부분인 patch(합이 0에 가까워야 함)를 표현할 수 없음.
 - ancilla = 0인 항목만 쓰면 합이 0 ~ 1 사이에서 자유로워지고, 이 '밝기 총합'도 학습 대상이 됨.
-- 3일차 노트북 §6 ①: 이 측정 방식을 바꾸자 클래스 평균 상관계수가 0.00에서 0.49로 올랐음(사전 실험).
+- 3일차 노트북 §6 ①: 이 측정 방식으로 바꾸자 생성 이미지 평균과 실제 평균의 상관계수가 0.00에서 0.49로 올랐음(8×8 단계 사전 실험).
 - 일반적인 ancilla 용도(오류 정정 신드롬 측정 등)와는 목적이 다름.</a:t>
             </a:r>
             <a:endParaRPr lang="en-US" dirty="0"/>
@@ -2503,7 +2503,7 @@
           <a:p>
             <a:r>
               <a:rPr lang="en-US" dirty="0"/>
-              <a:t>- 판별자 step: 실제 배치는 1, 생성 이미지는 0으로 맞히도록 학습. gen(BATCH).detach()로 생성자 쪽 계산 그래프를 끊어 판별자만 갱신함.
+              <a:t>- 판별자 step: 실제 batch는 1, 생성 이미지는 0으로 맞히도록 학습. gen(BATCH).detach()로 생성자 쪽 계산 그래프를 끊어 판별자만 갱신함.
 - 생성자 step: 생성 이미지에 정답 라벨 1을 붙여 손실을 계산함(non-saturating loss). 판별자를 속이는 방향으로 회전각이 갱신됨.
 - 실제 이미지는 복원추출로 8장씩 뽑음. 115장이라 1 epoch ≈ 14 step.</a:t>
             </a:r>
@@ -3948,7 +3948,7 @@
           <a:p>
             <a:r>
               <a:rPr lang="en-US" dirty="0"/>
-              <a:t>- ① 위치 정보 없이 밝기만으로 클러스터링함. pixels 모양은 (픽셀 수, 1).
+              <a:t>- ① 위치 정보 없이 밝기만으로 clustering함. pixels 모양은 (픽셀 수, 1).
 - ② sklearn KMeans 기본 초기화는 k-means++. n_init=4는 초기화를 4번 바꿔 inertia가 가장 낮은 결과를 씀.
 - ③ K-means 중심까지 거리의 역제곱으로 FCM 초기 소속도를 만듦(m=2일 때 FCM 소속도 공식과 같은 형태). 무작위 시작보다 빨리 수렴하고 결과가 매번 같음.
 - ④ FCM 결과 소속도가 가장 큰 cluster로 hard 라벨을 정한 뒤, 중심 밝기가 가장 낮은 cluster를 병변으로 봄.
@@ -29618,7 +29618,7 @@
                   <a:schemeClr val="accent6"/>
                 </a:solidFill>
               </a:rPr>
-              <a:t>회로의 형태(RY 인코딩 + RY·CZ 변분층 + post-selection)는 같고, 규모와 학습량을 줄임</a:t>
+              <a:t>회로의 형태(RY encoding + RY·CZ 변분층 + post-selection)는 같고, 규모와 학습량을 줄임</a:t>
             </a:r>
             <a:endParaRPr lang="en-US" sz="1400" dirty="0"/>
           </a:p>
@@ -33794,7 +33794,7 @@
                   <a:schemeClr val="tx1"/>
                 </a:solidFill>
               </a:rPr>
-              <a:t>FCM 비용이 픽셀 수에 비례함. 원본 27만 픽셀 대신 4,096픽셀로 클러스터링해 1장당 수 초로 줄임</a:t>
+              <a:t>FCM 비용이 픽셀 수에 비례함. 원본 27만 픽셀 대신 4,096픽셀로 clustering해 1장당 수 초로 줄임</a:t>
             </a:r>
             <a:endParaRPr lang="en-US" sz="1300" dirty="0"/>
           </a:p>
@@ -34322,7 +34322,7 @@
                 <a:ea typeface="Courier New" pitchFamily="34" charset="-122"/>
                 <a:cs typeface="Courier New" pitchFamily="34" charset="-120"/>
               </a:rPr>
-              <a:t>mask = (membership == lesion).reshape(64, 64) * 255</a:t>
+              <a:t>mask = ((membership == lesion).reshape(64, 64) * 255).astype(np.uint8)</a:t>
             </a:r>
             <a:endParaRPr lang="en-US" sz="1150" dirty="0"/>
           </a:p>
